--- a/Japan/Progress/Presentation 9.1 (IAD) Theory.pptx
+++ b/Japan/Progress/Presentation 9.1 (IAD) Theory.pptx
@@ -235,7 +235,7 @@
           <a:p>
             <a:fld id="{4E2EF82B-E016-44BD-B0C4-D5A3DF34FAF9}" type="datetimeFigureOut">
               <a:rPr lang="en-US" smtClean="0"/>
-              <a:t>12/10/2025</a:t>
+              <a:t>12/20/2025</a:t>
             </a:fld>
             <a:endParaRPr lang="en-US"/>
           </a:p>
@@ -766,7 +766,7 @@
             <a:fld id="{1D8BD707-D9CF-40AE-B4C6-C98DA3205C09}" type="datetimeFigureOut">
               <a:rPr lang="en-US" smtClean="0"/>
               <a:pPr/>
-              <a:t>12/10/2025</a:t>
+              <a:t>12/20/2025</a:t>
             </a:fld>
             <a:endParaRPr lang="en-US"/>
           </a:p>
@@ -931,7 +931,7 @@
             <a:fld id="{1D8BD707-D9CF-40AE-B4C6-C98DA3205C09}" type="datetimeFigureOut">
               <a:rPr lang="en-US" smtClean="0"/>
               <a:pPr/>
-              <a:t>12/10/2025</a:t>
+              <a:t>12/20/2025</a:t>
             </a:fld>
             <a:endParaRPr lang="en-US"/>
           </a:p>
@@ -1106,7 +1106,7 @@
             <a:fld id="{1D8BD707-D9CF-40AE-B4C6-C98DA3205C09}" type="datetimeFigureOut">
               <a:rPr lang="en-US" smtClean="0"/>
               <a:pPr/>
-              <a:t>12/10/2025</a:t>
+              <a:t>12/20/2025</a:t>
             </a:fld>
             <a:endParaRPr lang="en-US"/>
           </a:p>
@@ -1271,7 +1271,7 @@
             <a:fld id="{1D8BD707-D9CF-40AE-B4C6-C98DA3205C09}" type="datetimeFigureOut">
               <a:rPr lang="en-US" smtClean="0"/>
               <a:pPr/>
-              <a:t>12/10/2025</a:t>
+              <a:t>12/20/2025</a:t>
             </a:fld>
             <a:endParaRPr lang="en-US"/>
           </a:p>
@@ -1513,7 +1513,7 @@
             <a:fld id="{1D8BD707-D9CF-40AE-B4C6-C98DA3205C09}" type="datetimeFigureOut">
               <a:rPr lang="en-US" smtClean="0"/>
               <a:pPr/>
-              <a:t>12/10/2025</a:t>
+              <a:t>12/20/2025</a:t>
             </a:fld>
             <a:endParaRPr lang="en-US"/>
           </a:p>
@@ -1795,7 +1795,7 @@
             <a:fld id="{1D8BD707-D9CF-40AE-B4C6-C98DA3205C09}" type="datetimeFigureOut">
               <a:rPr lang="en-US" smtClean="0"/>
               <a:pPr/>
-              <a:t>12/10/2025</a:t>
+              <a:t>12/20/2025</a:t>
             </a:fld>
             <a:endParaRPr lang="en-US"/>
           </a:p>
@@ -2211,7 +2211,7 @@
             <a:fld id="{1D8BD707-D9CF-40AE-B4C6-C98DA3205C09}" type="datetimeFigureOut">
               <a:rPr lang="en-US" smtClean="0"/>
               <a:pPr/>
-              <a:t>12/10/2025</a:t>
+              <a:t>12/20/2025</a:t>
             </a:fld>
             <a:endParaRPr lang="en-US"/>
           </a:p>
@@ -2325,7 +2325,7 @@
             <a:fld id="{1D8BD707-D9CF-40AE-B4C6-C98DA3205C09}" type="datetimeFigureOut">
               <a:rPr lang="en-US" smtClean="0"/>
               <a:pPr/>
-              <a:t>12/10/2025</a:t>
+              <a:t>12/20/2025</a:t>
             </a:fld>
             <a:endParaRPr lang="en-US"/>
           </a:p>
@@ -2417,7 +2417,7 @@
             <a:fld id="{1D8BD707-D9CF-40AE-B4C6-C98DA3205C09}" type="datetimeFigureOut">
               <a:rPr lang="en-US" smtClean="0"/>
               <a:pPr/>
-              <a:t>12/10/2025</a:t>
+              <a:t>12/20/2025</a:t>
             </a:fld>
             <a:endParaRPr lang="en-US"/>
           </a:p>
@@ -2689,7 +2689,7 @@
             <a:fld id="{1D8BD707-D9CF-40AE-B4C6-C98DA3205C09}" type="datetimeFigureOut">
               <a:rPr lang="en-US" smtClean="0"/>
               <a:pPr/>
-              <a:t>12/10/2025</a:t>
+              <a:t>12/20/2025</a:t>
             </a:fld>
             <a:endParaRPr lang="en-US"/>
           </a:p>
@@ -2938,7 +2938,7 @@
             <a:fld id="{1D8BD707-D9CF-40AE-B4C6-C98DA3205C09}" type="datetimeFigureOut">
               <a:rPr lang="en-US" smtClean="0"/>
               <a:pPr/>
-              <a:t>12/10/2025</a:t>
+              <a:t>12/20/2025</a:t>
             </a:fld>
             <a:endParaRPr lang="en-US"/>
           </a:p>
@@ -3146,7 +3146,7 @@
             <a:fld id="{1D8BD707-D9CF-40AE-B4C6-C98DA3205C09}" type="datetimeFigureOut">
               <a:rPr lang="en-US" smtClean="0"/>
               <a:pPr/>
-              <a:t>12/10/2025</a:t>
+              <a:t>12/20/2025</a:t>
             </a:fld>
             <a:endParaRPr lang="en-US"/>
           </a:p>
@@ -3599,7 +3599,7 @@
               </a:lnSpc>
             </a:pPr>
             <a:r>
-              <a:rPr lang="en-US" sz="12000" dirty="0">
+              <a:rPr lang="en-US" sz="12000">
                 <a:solidFill>
                   <a:srgbClr val="000000"/>
                 </a:solidFill>
@@ -3608,8 +3608,17 @@
                 <a:cs typeface="DM Serif Display"/>
                 <a:sym typeface="DM Serif Display"/>
               </a:rPr>
-              <a:t>Presentation X</a:t>
+              <a:t>Presentation IX</a:t>
             </a:r>
+            <a:endParaRPr lang="en-US" sz="12000" dirty="0">
+              <a:solidFill>
+                <a:srgbClr val="000000"/>
+              </a:solidFill>
+              <a:latin typeface="DM Serif Display"/>
+              <a:ea typeface="DM Serif Display"/>
+              <a:cs typeface="DM Serif Display"/>
+              <a:sym typeface="DM Serif Display"/>
+            </a:endParaRPr>
           </a:p>
         </p:txBody>
       </p:sp>
@@ -10345,8 +10354,8 @@
           </a:p>
         </p:txBody>
       </p:sp>
-      <mc:AlternateContent xmlns:mc="http://schemas.openxmlformats.org/markup-compatibility/2006">
-        <mc:Choice xmlns:a14="http://schemas.microsoft.com/office/drawing/2010/main" Requires="a14">
+      <mc:AlternateContent xmlns:mc="http://schemas.openxmlformats.org/markup-compatibility/2006" xmlns:a14="http://schemas.microsoft.com/office/drawing/2010/main">
+        <mc:Choice Requires="a14">
           <p:sp>
             <p:nvSpPr>
               <p:cNvPr id="8" name="TextBox 8">
@@ -13162,7 +13171,7 @@
             </p:txBody>
           </p:sp>
         </mc:Choice>
-        <mc:Fallback>
+        <mc:Fallback xmlns="">
           <p:sp>
             <p:nvSpPr>
               <p:cNvPr id="8" name="TextBox 8">
